--- a/index.pptx
+++ b/index.pptx
@@ -3115,7 +3115,7 @@
             </a:pPr>
             <a:r>
               <a:rPr/>
-              <a:t>Template Slides</a:t>
+              <a:t>Test repository for separate slide decks</a:t>
             </a:r>
           </a:p>
         </p:txBody>
@@ -3145,7 +3145,7 @@
             </a:pPr>
             <a:r>
               <a:rPr/>
-              <a:t>Author Name</a:t>
+              <a:t>Sarah von Grebmer</a:t>
             </a:r>
           </a:p>
         </p:txBody>

--- a/index.pptx
+++ b/index.pptx
@@ -3115,7 +3115,7 @@
             </a:pPr>
             <a:r>
               <a:rPr/>
-              <a:t>Test repository for separate slide decks</a:t>
+              <a:t>Template Slides</a:t>
             </a:r>
           </a:p>
         </p:txBody>
@@ -3145,7 +3145,7 @@
             </a:pPr>
             <a:r>
               <a:rPr/>
-              <a:t>Sarah von Grebmer</a:t>
+              <a:t>Author Name</a:t>
             </a:r>
           </a:p>
         </p:txBody>

--- a/index.pptx
+++ b/index.pptx
@@ -3170,7 +3170,7 @@
             </a:pPr>
             <a:r>
               <a:rPr/>
-              <a:t>23/04/2026</a:t>
+              <a:t>26/04/2026</a:t>
             </a:r>
           </a:p>
         </p:txBody>

--- a/index.pptx
+++ b/index.pptx
@@ -3170,7 +3170,7 @@
             </a:pPr>
             <a:r>
               <a:rPr/>
-              <a:t>26/04/2026</a:t>
+              <a:t>03/05/2026</a:t>
             </a:r>
           </a:p>
         </p:txBody>

--- a/index.pptx
+++ b/index.pptx
@@ -3170,7 +3170,7 @@
             </a:pPr>
             <a:r>
               <a:rPr/>
-              <a:t>03/05/2026</a:t>
+              <a:t>10/05/2026</a:t>
             </a:r>
           </a:p>
         </p:txBody>

--- a/index.pptx
+++ b/index.pptx
@@ -3170,7 +3170,7 @@
             </a:pPr>
             <a:r>
               <a:rPr/>
-              <a:t>10/05/2026</a:t>
+              <a:t>17/05/2026</a:t>
             </a:r>
           </a:p>
         </p:txBody>

--- a/index.pptx
+++ b/index.pptx
@@ -3170,7 +3170,7 @@
             </a:pPr>
             <a:r>
               <a:rPr/>
-              <a:t>17/05/2026</a:t>
+              <a:t>25/05/2026</a:t>
             </a:r>
           </a:p>
         </p:txBody>

--- a/index.pptx
+++ b/index.pptx
@@ -3170,7 +3170,7 @@
             </a:pPr>
             <a:r>
               <a:rPr/>
-              <a:t>25/05/2026</a:t>
+              <a:t>01/06/2026</a:t>
             </a:r>
           </a:p>
         </p:txBody>

--- a/index.pptx
+++ b/index.pptx
@@ -3170,7 +3170,7 @@
             </a:pPr>
             <a:r>
               <a:rPr/>
-              <a:t>01/06/2026</a:t>
+              <a:t>08/06/2026</a:t>
             </a:r>
           </a:p>
         </p:txBody>

--- a/index.pptx
+++ b/index.pptx
@@ -3170,7 +3170,7 @@
             </a:pPr>
             <a:r>
               <a:rPr/>
-              <a:t>08/06/2026</a:t>
+              <a:t>15/06/2026</a:t>
             </a:r>
           </a:p>
         </p:txBody>

--- a/index.pptx
+++ b/index.pptx
@@ -3170,7 +3170,7 @@
             </a:pPr>
             <a:r>
               <a:rPr/>
-              <a:t>15/06/2026</a:t>
+              <a:t>22/06/2026</a:t>
             </a:r>
           </a:p>
         </p:txBody>

--- a/index.pptx
+++ b/index.pptx
@@ -3170,7 +3170,7 @@
             </a:pPr>
             <a:r>
               <a:rPr/>
-              <a:t>22/06/2026</a:t>
+              <a:t>29/06/2026</a:t>
             </a:r>
           </a:p>
         </p:txBody>

--- a/index.pptx
+++ b/index.pptx
@@ -3170,7 +3170,7 @@
             </a:pPr>
             <a:r>
               <a:rPr/>
-              <a:t>29/06/2026</a:t>
+              <a:t>06/07/2026</a:t>
             </a:r>
           </a:p>
         </p:txBody>

--- a/index.pptx
+++ b/index.pptx
@@ -3170,7 +3170,7 @@
             </a:pPr>
             <a:r>
               <a:rPr/>
-              <a:t>06/07/2026</a:t>
+              <a:t>12/07/2026</a:t>
             </a:r>
           </a:p>
         </p:txBody>

--- a/index.pptx
+++ b/index.pptx
@@ -3170,7 +3170,7 @@
             </a:pPr>
             <a:r>
               <a:rPr/>
-              <a:t>12/07/2026</a:t>
+              <a:t>20/07/2026</a:t>
             </a:r>
           </a:p>
         </p:txBody>

--- a/index.pptx
+++ b/index.pptx
@@ -3170,7 +3170,7 @@
             </a:pPr>
             <a:r>
               <a:rPr/>
-              <a:t>20/07/2026</a:t>
+              <a:t>26/07/2026</a:t>
             </a:r>
           </a:p>
         </p:txBody>

--- a/index.pptx
+++ b/index.pptx
@@ -3170,7 +3170,7 @@
             </a:pPr>
             <a:r>
               <a:rPr/>
-              <a:t>26/07/2026</a:t>
+              <a:t>02/08/2026</a:t>
             </a:r>
           </a:p>
         </p:txBody>

--- a/index.pptx
+++ b/index.pptx
@@ -3170,7 +3170,7 @@
             </a:pPr>
             <a:r>
               <a:rPr/>
-              <a:t>02/08/2026</a:t>
+              <a:t>09/08/2026</a:t>
             </a:r>
           </a:p>
         </p:txBody>

--- a/index.pptx
+++ b/index.pptx
@@ -3170,7 +3170,7 @@
             </a:pPr>
             <a:r>
               <a:rPr/>
-              <a:t>09/08/2026</a:t>
+              <a:t>16/08/2026</a:t>
             </a:r>
           </a:p>
         </p:txBody>

--- a/index.pptx
+++ b/index.pptx
@@ -3170,7 +3170,7 @@
             </a:pPr>
             <a:r>
               <a:rPr/>
-              <a:t>16/08/2026</a:t>
+              <a:t>23/08/2026</a:t>
             </a:r>
           </a:p>
         </p:txBody>

--- a/index.pptx
+++ b/index.pptx
@@ -3170,7 +3170,7 @@
             </a:pPr>
             <a:r>
               <a:rPr/>
-              <a:t>23/08/2026</a:t>
+              <a:t>31/08/2026</a:t>
             </a:r>
           </a:p>
         </p:txBody>

--- a/index.pptx
+++ b/index.pptx
@@ -3170,7 +3170,7 @@
             </a:pPr>
             <a:r>
               <a:rPr/>
-              <a:t>31/08/2026</a:t>
+              <a:t>07/09/2026</a:t>
             </a:r>
           </a:p>
         </p:txBody>
